--- a/ゲーム科1年/01_後期/プログラミングⅢ/09_クラスの継承.pptx
+++ b/ゲーム科1年/01_後期/プログラミングⅢ/09_クラスの継承.pptx
@@ -272,7 +272,7 @@
           <a:p>
             <a:fld id="{E9CC885B-4903-4D54-9A93-00025F12DED9}" type="datetimeFigureOut">
               <a:rPr kumimoji="1" lang="ja-JP" altLang="en-US" smtClean="0"/>
-              <a:t>2024/11/11</a:t>
+              <a:t>2025/2/7</a:t>
             </a:fld>
             <a:endParaRPr kumimoji="1" lang="ja-JP" altLang="en-US"/>
           </a:p>
@@ -502,7 +502,7 @@
           <a:p>
             <a:fld id="{E9CC885B-4903-4D54-9A93-00025F12DED9}" type="datetimeFigureOut">
               <a:rPr kumimoji="1" lang="ja-JP" altLang="en-US" smtClean="0"/>
-              <a:t>2024/11/11</a:t>
+              <a:t>2025/2/7</a:t>
             </a:fld>
             <a:endParaRPr kumimoji="1" lang="ja-JP" altLang="en-US"/>
           </a:p>
@@ -742,7 +742,7 @@
           <a:p>
             <a:fld id="{E9CC885B-4903-4D54-9A93-00025F12DED9}" type="datetimeFigureOut">
               <a:rPr kumimoji="1" lang="ja-JP" altLang="en-US" smtClean="0"/>
-              <a:t>2024/11/11</a:t>
+              <a:t>2025/2/7</a:t>
             </a:fld>
             <a:endParaRPr kumimoji="1" lang="ja-JP" altLang="en-US"/>
           </a:p>
@@ -972,7 +972,7 @@
           <a:p>
             <a:fld id="{E9CC885B-4903-4D54-9A93-00025F12DED9}" type="datetimeFigureOut">
               <a:rPr kumimoji="1" lang="ja-JP" altLang="en-US" smtClean="0"/>
-              <a:t>2024/11/11</a:t>
+              <a:t>2025/2/7</a:t>
             </a:fld>
             <a:endParaRPr kumimoji="1" lang="ja-JP" altLang="en-US"/>
           </a:p>
@@ -1247,7 +1247,7 @@
           <a:p>
             <a:fld id="{E9CC885B-4903-4D54-9A93-00025F12DED9}" type="datetimeFigureOut">
               <a:rPr kumimoji="1" lang="ja-JP" altLang="en-US" smtClean="0"/>
-              <a:t>2024/11/11</a:t>
+              <a:t>2025/2/7</a:t>
             </a:fld>
             <a:endParaRPr kumimoji="1" lang="ja-JP" altLang="en-US"/>
           </a:p>
@@ -1576,7 +1576,7 @@
           <a:p>
             <a:fld id="{E9CC885B-4903-4D54-9A93-00025F12DED9}" type="datetimeFigureOut">
               <a:rPr kumimoji="1" lang="ja-JP" altLang="en-US" smtClean="0"/>
-              <a:t>2024/11/11</a:t>
+              <a:t>2025/2/7</a:t>
             </a:fld>
             <a:endParaRPr kumimoji="1" lang="ja-JP" altLang="en-US"/>
           </a:p>
@@ -2052,7 +2052,7 @@
           <a:p>
             <a:fld id="{E9CC885B-4903-4D54-9A93-00025F12DED9}" type="datetimeFigureOut">
               <a:rPr kumimoji="1" lang="ja-JP" altLang="en-US" smtClean="0"/>
-              <a:t>2024/11/11</a:t>
+              <a:t>2025/2/7</a:t>
             </a:fld>
             <a:endParaRPr kumimoji="1" lang="ja-JP" altLang="en-US"/>
           </a:p>
@@ -2193,7 +2193,7 @@
           <a:p>
             <a:fld id="{E9CC885B-4903-4D54-9A93-00025F12DED9}" type="datetimeFigureOut">
               <a:rPr kumimoji="1" lang="ja-JP" altLang="en-US" smtClean="0"/>
-              <a:t>2024/11/11</a:t>
+              <a:t>2025/2/7</a:t>
             </a:fld>
             <a:endParaRPr kumimoji="1" lang="ja-JP" altLang="en-US"/>
           </a:p>
@@ -2306,7 +2306,7 @@
           <a:p>
             <a:fld id="{E9CC885B-4903-4D54-9A93-00025F12DED9}" type="datetimeFigureOut">
               <a:rPr kumimoji="1" lang="ja-JP" altLang="en-US" smtClean="0"/>
-              <a:t>2024/11/11</a:t>
+              <a:t>2025/2/7</a:t>
             </a:fld>
             <a:endParaRPr kumimoji="1" lang="ja-JP" altLang="en-US"/>
           </a:p>
@@ -2649,7 +2649,7 @@
           <a:p>
             <a:fld id="{E9CC885B-4903-4D54-9A93-00025F12DED9}" type="datetimeFigureOut">
               <a:rPr kumimoji="1" lang="ja-JP" altLang="en-US" smtClean="0"/>
-              <a:t>2024/11/11</a:t>
+              <a:t>2025/2/7</a:t>
             </a:fld>
             <a:endParaRPr kumimoji="1" lang="ja-JP" altLang="en-US"/>
           </a:p>
@@ -2937,7 +2937,7 @@
           <a:p>
             <a:fld id="{E9CC885B-4903-4D54-9A93-00025F12DED9}" type="datetimeFigureOut">
               <a:rPr kumimoji="1" lang="ja-JP" altLang="en-US" smtClean="0"/>
-              <a:t>2024/11/11</a:t>
+              <a:t>2025/2/7</a:t>
             </a:fld>
             <a:endParaRPr kumimoji="1" lang="ja-JP" altLang="en-US"/>
           </a:p>
@@ -3210,7 +3210,7 @@
           <a:p>
             <a:fld id="{E9CC885B-4903-4D54-9A93-00025F12DED9}" type="datetimeFigureOut">
               <a:rPr kumimoji="1" lang="ja-JP" altLang="en-US" smtClean="0"/>
-              <a:t>2024/11/11</a:t>
+              <a:t>2025/2/7</a:t>
             </a:fld>
             <a:endParaRPr kumimoji="1" lang="ja-JP" altLang="en-US"/>
           </a:p>

--- a/ゲーム科1年/01_後期/プログラミングⅢ/09_クラスの継承.pptx
+++ b/ゲーム科1年/01_後期/プログラミングⅢ/09_クラスの継承.pptx
@@ -9,16 +9,17 @@
     <p:sldId id="257" r:id="rId3"/>
     <p:sldId id="258" r:id="rId4"/>
     <p:sldId id="259" r:id="rId5"/>
-    <p:sldId id="260" r:id="rId6"/>
-    <p:sldId id="261" r:id="rId7"/>
-    <p:sldId id="262" r:id="rId8"/>
-    <p:sldId id="263" r:id="rId9"/>
-    <p:sldId id="264" r:id="rId10"/>
-    <p:sldId id="265" r:id="rId11"/>
-    <p:sldId id="266" r:id="rId12"/>
-    <p:sldId id="267" r:id="rId13"/>
-    <p:sldId id="268" r:id="rId14"/>
-    <p:sldId id="269" r:id="rId15"/>
+    <p:sldId id="270" r:id="rId6"/>
+    <p:sldId id="260" r:id="rId7"/>
+    <p:sldId id="261" r:id="rId8"/>
+    <p:sldId id="262" r:id="rId9"/>
+    <p:sldId id="263" r:id="rId10"/>
+    <p:sldId id="264" r:id="rId11"/>
+    <p:sldId id="265" r:id="rId12"/>
+    <p:sldId id="266" r:id="rId13"/>
+    <p:sldId id="267" r:id="rId14"/>
+    <p:sldId id="268" r:id="rId15"/>
+    <p:sldId id="269" r:id="rId16"/>
   </p:sldIdLst>
   <p:sldSz cx="12192000" cy="6858000"/>
   <p:notesSz cx="6858000" cy="9144000"/>
@@ -272,7 +273,7 @@
           <a:p>
             <a:fld id="{E9CC885B-4903-4D54-9A93-00025F12DED9}" type="datetimeFigureOut">
               <a:rPr kumimoji="1" lang="ja-JP" altLang="en-US" smtClean="0"/>
-              <a:t>2025/2/7</a:t>
+              <a:t>2026/2/12</a:t>
             </a:fld>
             <a:endParaRPr kumimoji="1" lang="ja-JP" altLang="en-US"/>
           </a:p>
@@ -502,7 +503,7 @@
           <a:p>
             <a:fld id="{E9CC885B-4903-4D54-9A93-00025F12DED9}" type="datetimeFigureOut">
               <a:rPr kumimoji="1" lang="ja-JP" altLang="en-US" smtClean="0"/>
-              <a:t>2025/2/7</a:t>
+              <a:t>2026/2/12</a:t>
             </a:fld>
             <a:endParaRPr kumimoji="1" lang="ja-JP" altLang="en-US"/>
           </a:p>
@@ -742,7 +743,7 @@
           <a:p>
             <a:fld id="{E9CC885B-4903-4D54-9A93-00025F12DED9}" type="datetimeFigureOut">
               <a:rPr kumimoji="1" lang="ja-JP" altLang="en-US" smtClean="0"/>
-              <a:t>2025/2/7</a:t>
+              <a:t>2026/2/12</a:t>
             </a:fld>
             <a:endParaRPr kumimoji="1" lang="ja-JP" altLang="en-US"/>
           </a:p>
@@ -972,7 +973,7 @@
           <a:p>
             <a:fld id="{E9CC885B-4903-4D54-9A93-00025F12DED9}" type="datetimeFigureOut">
               <a:rPr kumimoji="1" lang="ja-JP" altLang="en-US" smtClean="0"/>
-              <a:t>2025/2/7</a:t>
+              <a:t>2026/2/12</a:t>
             </a:fld>
             <a:endParaRPr kumimoji="1" lang="ja-JP" altLang="en-US"/>
           </a:p>
@@ -1247,7 +1248,7 @@
           <a:p>
             <a:fld id="{E9CC885B-4903-4D54-9A93-00025F12DED9}" type="datetimeFigureOut">
               <a:rPr kumimoji="1" lang="ja-JP" altLang="en-US" smtClean="0"/>
-              <a:t>2025/2/7</a:t>
+              <a:t>2026/2/12</a:t>
             </a:fld>
             <a:endParaRPr kumimoji="1" lang="ja-JP" altLang="en-US"/>
           </a:p>
@@ -1576,7 +1577,7 @@
           <a:p>
             <a:fld id="{E9CC885B-4903-4D54-9A93-00025F12DED9}" type="datetimeFigureOut">
               <a:rPr kumimoji="1" lang="ja-JP" altLang="en-US" smtClean="0"/>
-              <a:t>2025/2/7</a:t>
+              <a:t>2026/2/12</a:t>
             </a:fld>
             <a:endParaRPr kumimoji="1" lang="ja-JP" altLang="en-US"/>
           </a:p>
@@ -2052,7 +2053,7 @@
           <a:p>
             <a:fld id="{E9CC885B-4903-4D54-9A93-00025F12DED9}" type="datetimeFigureOut">
               <a:rPr kumimoji="1" lang="ja-JP" altLang="en-US" smtClean="0"/>
-              <a:t>2025/2/7</a:t>
+              <a:t>2026/2/12</a:t>
             </a:fld>
             <a:endParaRPr kumimoji="1" lang="ja-JP" altLang="en-US"/>
           </a:p>
@@ -2193,7 +2194,7 @@
           <a:p>
             <a:fld id="{E9CC885B-4903-4D54-9A93-00025F12DED9}" type="datetimeFigureOut">
               <a:rPr kumimoji="1" lang="ja-JP" altLang="en-US" smtClean="0"/>
-              <a:t>2025/2/7</a:t>
+              <a:t>2026/2/12</a:t>
             </a:fld>
             <a:endParaRPr kumimoji="1" lang="ja-JP" altLang="en-US"/>
           </a:p>
@@ -2306,7 +2307,7 @@
           <a:p>
             <a:fld id="{E9CC885B-4903-4D54-9A93-00025F12DED9}" type="datetimeFigureOut">
               <a:rPr kumimoji="1" lang="ja-JP" altLang="en-US" smtClean="0"/>
-              <a:t>2025/2/7</a:t>
+              <a:t>2026/2/12</a:t>
             </a:fld>
             <a:endParaRPr kumimoji="1" lang="ja-JP" altLang="en-US"/>
           </a:p>
@@ -2649,7 +2650,7 @@
           <a:p>
             <a:fld id="{E9CC885B-4903-4D54-9A93-00025F12DED9}" type="datetimeFigureOut">
               <a:rPr kumimoji="1" lang="ja-JP" altLang="en-US" smtClean="0"/>
-              <a:t>2025/2/7</a:t>
+              <a:t>2026/2/12</a:t>
             </a:fld>
             <a:endParaRPr kumimoji="1" lang="ja-JP" altLang="en-US"/>
           </a:p>
@@ -2937,7 +2938,7 @@
           <a:p>
             <a:fld id="{E9CC885B-4903-4D54-9A93-00025F12DED9}" type="datetimeFigureOut">
               <a:rPr kumimoji="1" lang="ja-JP" altLang="en-US" smtClean="0"/>
-              <a:t>2025/2/7</a:t>
+              <a:t>2026/2/12</a:t>
             </a:fld>
             <a:endParaRPr kumimoji="1" lang="ja-JP" altLang="en-US"/>
           </a:p>
@@ -3210,7 +3211,7 @@
           <a:p>
             <a:fld id="{E9CC885B-4903-4D54-9A93-00025F12DED9}" type="datetimeFigureOut">
               <a:rPr kumimoji="1" lang="ja-JP" altLang="en-US" smtClean="0"/>
-              <a:t>2025/2/7</a:t>
+              <a:t>2026/2/12</a:t>
             </a:fld>
             <a:endParaRPr kumimoji="1" lang="ja-JP" altLang="en-US"/>
           </a:p>
@@ -3809,7 +3810,7 @@
         <p:spPr>
           <a:xfrm>
             <a:off x="567542" y="1216429"/>
-            <a:ext cx="10490372" cy="4524315"/>
+            <a:ext cx="10745249" cy="830997"/>
           </a:xfrm>
           <a:prstGeom prst="rect">
             <a:avLst/>
@@ -3824,145 +3825,161 @@
           <a:p>
             <a:r>
               <a:rPr lang="ja-JP" altLang="en-US" sz="2400" dirty="0"/>
-              <a:t>つまり</a:t>
+              <a:t>ただし、</a:t>
             </a:r>
             <a:r>
               <a:rPr lang="en-US" altLang="ja-JP" sz="2400" b="1" dirty="0">
                 <a:solidFill>
-                  <a:srgbClr val="00B050"/>
+                  <a:srgbClr val="FF0000"/>
                 </a:solidFill>
               </a:rPr>
               <a:t>Fruit</a:t>
             </a:r>
-            <a:r>
-              <a:rPr lang="ja-JP" altLang="en-US" sz="2400" dirty="0"/>
-              <a:t>クラスのデータと機能に</a:t>
-            </a:r>
-            <a:r>
-              <a:rPr lang="en-US" altLang="ja-JP" sz="2400" b="1" dirty="0">
-                <a:solidFill>
-                  <a:srgbClr val="00B050"/>
-                </a:solidFill>
-              </a:rPr>
-              <a:t>Food</a:t>
-            </a:r>
-            <a:r>
-              <a:rPr lang="ja-JP" altLang="en-US" sz="2400" dirty="0"/>
-              <a:t>クラスのものが引き継がれます。</a:t>
-            </a:r>
-            <a:endParaRPr lang="en-US" altLang="ja-JP" sz="2400" dirty="0"/>
-          </a:p>
-          <a:p>
-            <a:endParaRPr lang="en-US" altLang="ja-JP" sz="2400" dirty="0"/>
-          </a:p>
-          <a:p>
             <a:r>
               <a:rPr lang="ja-JP" altLang="en-US" sz="2400" b="1" dirty="0">
                 <a:solidFill>
                   <a:srgbClr val="FF0000"/>
                 </a:solidFill>
               </a:rPr>
-              <a:t>■データ</a:t>
-            </a:r>
-            <a:endParaRPr lang="en-US" altLang="ja-JP" sz="2400" b="1" dirty="0">
-              <a:solidFill>
-                <a:srgbClr val="FF0000"/>
-              </a:solidFill>
-            </a:endParaRPr>
-          </a:p>
-          <a:p>
-            <a:r>
-              <a:rPr lang="ja-JP" altLang="en-US" sz="2400" b="1" dirty="0">
+              <a:t>クラスは宣言時に</a:t>
+            </a:r>
+            <a:r>
+              <a:rPr lang="en-US" altLang="ja-JP" sz="2400" b="1" dirty="0">
                 <a:solidFill>
-                  <a:srgbClr val="0070C0"/>
+                  <a:srgbClr val="FF0000"/>
                 </a:solidFill>
               </a:rPr>
-              <a:t>・値段</a:t>
-            </a:r>
-            <a:endParaRPr lang="en-US" altLang="ja-JP" sz="2400" b="1" dirty="0">
-              <a:solidFill>
-                <a:srgbClr val="0070C0"/>
-              </a:solidFill>
-            </a:endParaRPr>
-          </a:p>
-          <a:p>
-            <a:r>
-              <a:rPr lang="ja-JP" altLang="en-US" sz="2400" dirty="0"/>
-              <a:t>・農場名</a:t>
-            </a:r>
-            <a:endParaRPr lang="en-US" altLang="ja-JP" sz="2400" dirty="0"/>
-          </a:p>
-          <a:p>
-            <a:endParaRPr lang="en-US" altLang="ja-JP" sz="2400" dirty="0"/>
-          </a:p>
-          <a:p>
-            <a:endParaRPr lang="en-US" altLang="ja-JP" sz="2400" dirty="0"/>
-          </a:p>
-          <a:p>
+              <a:t>Food</a:t>
+            </a:r>
             <a:r>
               <a:rPr lang="ja-JP" altLang="en-US" sz="2400" b="1" dirty="0">
                 <a:solidFill>
                   <a:srgbClr val="FF0000"/>
                 </a:solidFill>
               </a:rPr>
-              <a:t>■機能</a:t>
-            </a:r>
-            <a:endParaRPr lang="en-US" altLang="ja-JP" sz="2400" b="1" dirty="0">
-              <a:solidFill>
-                <a:srgbClr val="FF0000"/>
-              </a:solidFill>
-            </a:endParaRPr>
-          </a:p>
-          <a:p>
+              <a:t>クラスを継承</a:t>
+            </a:r>
+            <a:r>
+              <a:rPr lang="ja-JP" altLang="en-US" sz="2400" dirty="0"/>
+              <a:t>しています。</a:t>
+            </a:r>
+            <a:endParaRPr lang="en-US" altLang="ja-JP" sz="2400" dirty="0"/>
+          </a:p>
+          <a:p>
+            <a:r>
+              <a:rPr lang="ja-JP" altLang="en-US" sz="2400" dirty="0"/>
+              <a:t>これは</a:t>
+            </a:r>
+            <a:r>
+              <a:rPr lang="en-US" altLang="ja-JP" sz="2400" b="1" dirty="0">
+                <a:solidFill>
+                  <a:srgbClr val="FF0000"/>
+                </a:solidFill>
+              </a:rPr>
+              <a:t>Food</a:t>
+            </a:r>
             <a:r>
               <a:rPr lang="ja-JP" altLang="en-US" sz="2400" b="1" dirty="0">
                 <a:solidFill>
-                  <a:srgbClr val="0070C0"/>
+                  <a:srgbClr val="FF0000"/>
                 </a:solidFill>
               </a:rPr>
-              <a:t>・値段を設定する</a:t>
-            </a:r>
-            <a:endParaRPr lang="en-US" altLang="ja-JP" sz="2400" b="1" dirty="0">
-              <a:solidFill>
-                <a:srgbClr val="0070C0"/>
-              </a:solidFill>
-            </a:endParaRPr>
-          </a:p>
-          <a:p>
-            <a:r>
-              <a:rPr lang="ja-JP" altLang="en-US" sz="2400" b="1" dirty="0">
-                <a:solidFill>
-                  <a:srgbClr val="0070C0"/>
-                </a:solidFill>
-              </a:rPr>
-              <a:t>・値段を取得する</a:t>
-            </a:r>
-            <a:endParaRPr lang="en-US" altLang="ja-JP" sz="2400" b="1" dirty="0">
-              <a:solidFill>
-                <a:srgbClr val="0070C0"/>
-              </a:solidFill>
-            </a:endParaRPr>
-          </a:p>
-          <a:p>
+              <a:t>クラスのデータと機能をすべて引き継ぐ</a:t>
+            </a:r>
             <a:r>
               <a:rPr lang="ja-JP" altLang="en-US" sz="2400" dirty="0"/>
-              <a:t>・農場名を設定する</a:t>
+              <a:t>という設定になります。</a:t>
             </a:r>
             <a:endParaRPr lang="en-US" altLang="ja-JP" sz="2400" dirty="0"/>
           </a:p>
-          <a:p>
-            <a:r>
-              <a:rPr lang="ja-JP" altLang="en-US" sz="2400" dirty="0"/>
-              <a:t>・農場名を取得する</a:t>
-            </a:r>
-            <a:endParaRPr lang="en-US" altLang="ja-JP" sz="2400" dirty="0"/>
+        </p:txBody>
+      </p:sp>
+      <p:pic>
+        <p:nvPicPr>
+          <p:cNvPr id="3" name="図 2">
+            <a:extLst>
+              <a:ext uri="{FF2B5EF4-FFF2-40B4-BE49-F238E27FC236}">
+                <a16:creationId xmlns:a16="http://schemas.microsoft.com/office/drawing/2014/main" id="{E21F31F4-8953-4CFE-B3CC-AE988AB8F30E}"/>
+              </a:ext>
+            </a:extLst>
+          </p:cNvPr>
+          <p:cNvPicPr>
+            <a:picLocks noChangeAspect="1"/>
+          </p:cNvPicPr>
+          <p:nvPr/>
+        </p:nvPicPr>
+        <p:blipFill>
+          <a:blip r:embed="rId2"/>
+          <a:stretch>
+            <a:fillRect/>
+          </a:stretch>
+        </p:blipFill>
+        <p:spPr>
+          <a:xfrm>
+            <a:off x="567541" y="2187126"/>
+            <a:ext cx="7637337" cy="4178920"/>
+          </a:xfrm>
+          <a:prstGeom prst="rect">
+            <a:avLst/>
+          </a:prstGeom>
+        </p:spPr>
+      </p:pic>
+      <p:sp>
+        <p:nvSpPr>
+          <p:cNvPr id="5" name="正方形/長方形 4">
+            <a:extLst>
+              <a:ext uri="{FF2B5EF4-FFF2-40B4-BE49-F238E27FC236}">
+                <a16:creationId xmlns:a16="http://schemas.microsoft.com/office/drawing/2014/main" id="{DA94D52C-A921-4AC2-BDB7-62E751D392E3}"/>
+              </a:ext>
+            </a:extLst>
+          </p:cNvPr>
+          <p:cNvSpPr/>
+          <p:nvPr/>
+        </p:nvSpPr>
+        <p:spPr>
+          <a:xfrm>
+            <a:off x="3304007" y="3558988"/>
+            <a:ext cx="2182333" cy="510988"/>
+          </a:xfrm>
+          <a:prstGeom prst="rect">
+            <a:avLst/>
+          </a:prstGeom>
+          <a:noFill/>
+          <a:ln w="76200">
+            <a:solidFill>
+              <a:srgbClr val="FF0000"/>
+            </a:solidFill>
+          </a:ln>
+        </p:spPr>
+        <p:style>
+          <a:lnRef idx="2">
+            <a:schemeClr val="accent1">
+              <a:shade val="50000"/>
+            </a:schemeClr>
+          </a:lnRef>
+          <a:fillRef idx="1">
+            <a:schemeClr val="accent1"/>
+          </a:fillRef>
+          <a:effectRef idx="0">
+            <a:schemeClr val="accent1"/>
+          </a:effectRef>
+          <a:fontRef idx="minor">
+            <a:schemeClr val="lt1"/>
+          </a:fontRef>
+        </p:style>
+        <p:txBody>
+          <a:bodyPr rtlCol="0" anchor="ctr"/>
+          <a:lstStyle/>
+          <a:p>
+            <a:pPr algn="ctr"/>
+            <a:endParaRPr kumimoji="1" lang="ja-JP" altLang="en-US"/>
           </a:p>
         </p:txBody>
       </p:sp>
     </p:spTree>
     <p:extLst>
       <p:ext uri="{BB962C8B-B14F-4D97-AF65-F5344CB8AC3E}">
-        <p14:creationId xmlns:p14="http://schemas.microsoft.com/office/powerpoint/2010/main" val="2968272201"/>
+        <p14:creationId xmlns:p14="http://schemas.microsoft.com/office/powerpoint/2010/main" val="3098660177"/>
       </p:ext>
     </p:extLst>
   </p:cSld>
@@ -4040,7 +4057,7 @@
         <p:spPr>
           <a:xfrm>
             <a:off x="567542" y="1216429"/>
-            <a:ext cx="8417689" cy="461665"/>
+            <a:ext cx="10490372" cy="4524315"/>
           </a:xfrm>
           <a:prstGeom prst="rect">
             <a:avLst/>
@@ -4055,39 +4072,88 @@
           <a:p>
             <a:r>
               <a:rPr lang="ja-JP" altLang="en-US" sz="2400" dirty="0"/>
-              <a:t>これにより</a:t>
+              <a:t>つまり</a:t>
             </a:r>
             <a:r>
               <a:rPr lang="en-US" altLang="ja-JP" sz="2400" b="1" dirty="0">
                 <a:solidFill>
-                  <a:srgbClr val="FF0000"/>
+                  <a:srgbClr val="00B050"/>
                 </a:solidFill>
               </a:rPr>
               <a:t>Fruit</a:t>
             </a:r>
+            <a:r>
+              <a:rPr lang="ja-JP" altLang="en-US" sz="2400" dirty="0"/>
+              <a:t>クラスのデータと機能に</a:t>
+            </a:r>
+            <a:r>
+              <a:rPr lang="en-US" altLang="ja-JP" sz="2400" b="1" dirty="0">
+                <a:solidFill>
+                  <a:srgbClr val="00B050"/>
+                </a:solidFill>
+              </a:rPr>
+              <a:t>Food</a:t>
+            </a:r>
+            <a:r>
+              <a:rPr lang="ja-JP" altLang="en-US" sz="2400" dirty="0"/>
+              <a:t>クラスのものが引き継がれます。</a:t>
+            </a:r>
+            <a:endParaRPr lang="en-US" altLang="ja-JP" sz="2400" dirty="0"/>
+          </a:p>
+          <a:p>
+            <a:endParaRPr lang="en-US" altLang="ja-JP" sz="2400" dirty="0"/>
+          </a:p>
+          <a:p>
             <a:r>
               <a:rPr lang="ja-JP" altLang="en-US" sz="2400" b="1" dirty="0">
                 <a:solidFill>
                   <a:srgbClr val="FF0000"/>
                 </a:solidFill>
               </a:rPr>
-              <a:t>クラスでも</a:t>
-            </a:r>
-            <a:r>
-              <a:rPr lang="en-US" altLang="ja-JP" sz="2400" b="1" dirty="0">
+              <a:t>■データ</a:t>
+            </a:r>
+            <a:endParaRPr lang="en-US" altLang="ja-JP" sz="2400" b="1" dirty="0">
+              <a:solidFill>
+                <a:srgbClr val="FF0000"/>
+              </a:solidFill>
+            </a:endParaRPr>
+          </a:p>
+          <a:p>
+            <a:r>
+              <a:rPr lang="ja-JP" altLang="en-US" sz="2400" b="1" dirty="0">
                 <a:solidFill>
-                  <a:srgbClr val="FF0000"/>
+                  <a:srgbClr val="0070C0"/>
                 </a:solidFill>
               </a:rPr>
-              <a:t>Food</a:t>
-            </a:r>
+              <a:t>・値段</a:t>
+            </a:r>
+            <a:endParaRPr lang="en-US" altLang="ja-JP" sz="2400" b="1" dirty="0">
+              <a:solidFill>
+                <a:srgbClr val="0070C0"/>
+              </a:solidFill>
+            </a:endParaRPr>
+          </a:p>
+          <a:p>
+            <a:r>
+              <a:rPr lang="ja-JP" altLang="en-US" sz="2400" dirty="0"/>
+              <a:t>・農場名</a:t>
+            </a:r>
+            <a:endParaRPr lang="en-US" altLang="ja-JP" sz="2400" dirty="0"/>
+          </a:p>
+          <a:p>
+            <a:endParaRPr lang="en-US" altLang="ja-JP" sz="2400" dirty="0"/>
+          </a:p>
+          <a:p>
+            <a:endParaRPr lang="en-US" altLang="ja-JP" sz="2400" dirty="0"/>
+          </a:p>
+          <a:p>
             <a:r>
               <a:rPr lang="ja-JP" altLang="en-US" sz="2400" b="1" dirty="0">
                 <a:solidFill>
                   <a:srgbClr val="FF0000"/>
                 </a:solidFill>
               </a:rPr>
-              <a:t>クラスの機能が使えます。</a:t>
+              <a:t>■機能</a:t>
             </a:r>
             <a:endParaRPr lang="en-US" altLang="ja-JP" sz="2400" b="1" dirty="0">
               <a:solidFill>
@@ -4095,146 +4161,56 @@
               </a:solidFill>
             </a:endParaRPr>
           </a:p>
-        </p:txBody>
-      </p:sp>
-      <p:pic>
-        <p:nvPicPr>
-          <p:cNvPr id="3" name="図 2">
-            <a:extLst>
-              <a:ext uri="{FF2B5EF4-FFF2-40B4-BE49-F238E27FC236}">
-                <a16:creationId xmlns:a16="http://schemas.microsoft.com/office/drawing/2014/main" id="{7AC44B9E-5D54-413B-B076-8D9630367C33}"/>
-              </a:ext>
-            </a:extLst>
-          </p:cNvPr>
-          <p:cNvPicPr>
-            <a:picLocks noChangeAspect="1"/>
-          </p:cNvPicPr>
-          <p:nvPr/>
-        </p:nvPicPr>
-        <p:blipFill>
-          <a:blip r:embed="rId2"/>
-          <a:stretch>
-            <a:fillRect/>
-          </a:stretch>
-        </p:blipFill>
-        <p:spPr>
-          <a:xfrm>
-            <a:off x="567542" y="1817794"/>
-            <a:ext cx="6973273" cy="4753638"/>
-          </a:xfrm>
-          <a:prstGeom prst="rect">
-            <a:avLst/>
-          </a:prstGeom>
-        </p:spPr>
-      </p:pic>
-      <p:sp>
-        <p:nvSpPr>
-          <p:cNvPr id="7" name="正方形/長方形 6">
-            <a:extLst>
-              <a:ext uri="{FF2B5EF4-FFF2-40B4-BE49-F238E27FC236}">
-                <a16:creationId xmlns:a16="http://schemas.microsoft.com/office/drawing/2014/main" id="{BACC4412-AB7E-4AD0-A0E1-5A3A7E23ED4A}"/>
-              </a:ext>
-            </a:extLst>
-          </p:cNvPr>
-          <p:cNvSpPr/>
-          <p:nvPr/>
-        </p:nvSpPr>
-        <p:spPr>
-          <a:xfrm>
-            <a:off x="1744148" y="3648635"/>
-            <a:ext cx="5122817" cy="654424"/>
-          </a:xfrm>
-          <a:prstGeom prst="rect">
-            <a:avLst/>
-          </a:prstGeom>
-          <a:noFill/>
-          <a:ln w="76200">
-            <a:solidFill>
-              <a:srgbClr val="FF0000"/>
-            </a:solidFill>
-          </a:ln>
-        </p:spPr>
-        <p:style>
-          <a:lnRef idx="2">
-            <a:schemeClr val="accent1">
-              <a:shade val="50000"/>
-            </a:schemeClr>
-          </a:lnRef>
-          <a:fillRef idx="1">
-            <a:schemeClr val="accent1"/>
-          </a:fillRef>
-          <a:effectRef idx="0">
-            <a:schemeClr val="accent1"/>
-          </a:effectRef>
-          <a:fontRef idx="minor">
-            <a:schemeClr val="lt1"/>
-          </a:fontRef>
-        </p:style>
-        <p:txBody>
-          <a:bodyPr rtlCol="0" anchor="ctr"/>
-          <a:lstStyle/>
-          <a:p>
-            <a:pPr algn="ctr"/>
-            <a:endParaRPr kumimoji="1" lang="ja-JP" altLang="en-US"/>
-          </a:p>
-        </p:txBody>
-      </p:sp>
-      <p:sp>
-        <p:nvSpPr>
-          <p:cNvPr id="8" name="正方形/長方形 7">
-            <a:extLst>
-              <a:ext uri="{FF2B5EF4-FFF2-40B4-BE49-F238E27FC236}">
-                <a16:creationId xmlns:a16="http://schemas.microsoft.com/office/drawing/2014/main" id="{B5C5AC69-27D5-431C-B27F-07F8308570E1}"/>
-              </a:ext>
-            </a:extLst>
-          </p:cNvPr>
-          <p:cNvSpPr/>
-          <p:nvPr/>
-        </p:nvSpPr>
-        <p:spPr>
-          <a:xfrm>
-            <a:off x="4007224" y="5414682"/>
-            <a:ext cx="1873623" cy="340660"/>
-          </a:xfrm>
-          <a:prstGeom prst="rect">
-            <a:avLst/>
-          </a:prstGeom>
-          <a:noFill/>
-          <a:ln w="76200">
-            <a:solidFill>
-              <a:srgbClr val="FF0000"/>
-            </a:solidFill>
-          </a:ln>
-        </p:spPr>
-        <p:style>
-          <a:lnRef idx="2">
-            <a:schemeClr val="accent1">
-              <a:shade val="50000"/>
-            </a:schemeClr>
-          </a:lnRef>
-          <a:fillRef idx="1">
-            <a:schemeClr val="accent1"/>
-          </a:fillRef>
-          <a:effectRef idx="0">
-            <a:schemeClr val="accent1"/>
-          </a:effectRef>
-          <a:fontRef idx="minor">
-            <a:schemeClr val="lt1"/>
-          </a:fontRef>
-        </p:style>
-        <p:txBody>
-          <a:bodyPr rtlCol="0" anchor="ctr"/>
-          <a:lstStyle/>
-          <a:p>
-            <a:pPr algn="ctr"/>
-            <a:endParaRPr kumimoji="1" lang="ja-JP" altLang="en-US"/>
+          <a:p>
+            <a:r>
+              <a:rPr lang="ja-JP" altLang="en-US" sz="2400" b="1" dirty="0">
+                <a:solidFill>
+                  <a:srgbClr val="0070C0"/>
+                </a:solidFill>
+              </a:rPr>
+              <a:t>・値段を設定する</a:t>
+            </a:r>
+            <a:endParaRPr lang="en-US" altLang="ja-JP" sz="2400" b="1" dirty="0">
+              <a:solidFill>
+                <a:srgbClr val="0070C0"/>
+              </a:solidFill>
+            </a:endParaRPr>
+          </a:p>
+          <a:p>
+            <a:r>
+              <a:rPr lang="ja-JP" altLang="en-US" sz="2400" b="1" dirty="0">
+                <a:solidFill>
+                  <a:srgbClr val="0070C0"/>
+                </a:solidFill>
+              </a:rPr>
+              <a:t>・値段を取得する</a:t>
+            </a:r>
+            <a:endParaRPr lang="en-US" altLang="ja-JP" sz="2400" b="1" dirty="0">
+              <a:solidFill>
+                <a:srgbClr val="0070C0"/>
+              </a:solidFill>
+            </a:endParaRPr>
+          </a:p>
+          <a:p>
+            <a:r>
+              <a:rPr lang="ja-JP" altLang="en-US" sz="2400" dirty="0"/>
+              <a:t>・農場名を設定する</a:t>
+            </a:r>
+            <a:endParaRPr lang="en-US" altLang="ja-JP" sz="2400" dirty="0"/>
+          </a:p>
+          <a:p>
+            <a:r>
+              <a:rPr lang="ja-JP" altLang="en-US" sz="2400" dirty="0"/>
+              <a:t>・農場名を取得する</a:t>
+            </a:r>
+            <a:endParaRPr lang="en-US" altLang="ja-JP" sz="2400" dirty="0"/>
           </a:p>
         </p:txBody>
       </p:sp>
     </p:spTree>
     <p:extLst>
       <p:ext uri="{BB962C8B-B14F-4D97-AF65-F5344CB8AC3E}">
-        <p14:creationId xmlns:p14="http://schemas.microsoft.com/office/powerpoint/2010/main" val="1908405031"/>
+        <p14:creationId xmlns:p14="http://schemas.microsoft.com/office/powerpoint/2010/main" val="2968272201"/>
       </p:ext>
     </p:extLst>
   </p:cSld>
@@ -4312,6 +4288,278 @@
         <p:spPr>
           <a:xfrm>
             <a:off x="567542" y="1216429"/>
+            <a:ext cx="8417689" cy="461665"/>
+          </a:xfrm>
+          <a:prstGeom prst="rect">
+            <a:avLst/>
+          </a:prstGeom>
+          <a:noFill/>
+        </p:spPr>
+        <p:txBody>
+          <a:bodyPr wrap="none" rtlCol="0">
+            <a:spAutoFit/>
+          </a:bodyPr>
+          <a:lstStyle/>
+          <a:p>
+            <a:r>
+              <a:rPr lang="ja-JP" altLang="en-US" sz="2400" dirty="0"/>
+              <a:t>これにより</a:t>
+            </a:r>
+            <a:r>
+              <a:rPr lang="en-US" altLang="ja-JP" sz="2400" b="1" dirty="0">
+                <a:solidFill>
+                  <a:srgbClr val="FF0000"/>
+                </a:solidFill>
+              </a:rPr>
+              <a:t>Fruit</a:t>
+            </a:r>
+            <a:r>
+              <a:rPr lang="ja-JP" altLang="en-US" sz="2400" b="1" dirty="0">
+                <a:solidFill>
+                  <a:srgbClr val="FF0000"/>
+                </a:solidFill>
+              </a:rPr>
+              <a:t>クラスでも</a:t>
+            </a:r>
+            <a:r>
+              <a:rPr lang="en-US" altLang="ja-JP" sz="2400" b="1" dirty="0">
+                <a:solidFill>
+                  <a:srgbClr val="FF0000"/>
+                </a:solidFill>
+              </a:rPr>
+              <a:t>Food</a:t>
+            </a:r>
+            <a:r>
+              <a:rPr lang="ja-JP" altLang="en-US" sz="2400" b="1" dirty="0">
+                <a:solidFill>
+                  <a:srgbClr val="FF0000"/>
+                </a:solidFill>
+              </a:rPr>
+              <a:t>クラスの機能が使えます。</a:t>
+            </a:r>
+            <a:endParaRPr lang="en-US" altLang="ja-JP" sz="2400" b="1" dirty="0">
+              <a:solidFill>
+                <a:srgbClr val="FF0000"/>
+              </a:solidFill>
+            </a:endParaRPr>
+          </a:p>
+        </p:txBody>
+      </p:sp>
+      <p:pic>
+        <p:nvPicPr>
+          <p:cNvPr id="3" name="図 2">
+            <a:extLst>
+              <a:ext uri="{FF2B5EF4-FFF2-40B4-BE49-F238E27FC236}">
+                <a16:creationId xmlns:a16="http://schemas.microsoft.com/office/drawing/2014/main" id="{7AC44B9E-5D54-413B-B076-8D9630367C33}"/>
+              </a:ext>
+            </a:extLst>
+          </p:cNvPr>
+          <p:cNvPicPr>
+            <a:picLocks noChangeAspect="1"/>
+          </p:cNvPicPr>
+          <p:nvPr/>
+        </p:nvPicPr>
+        <p:blipFill>
+          <a:blip r:embed="rId2"/>
+          <a:stretch>
+            <a:fillRect/>
+          </a:stretch>
+        </p:blipFill>
+        <p:spPr>
+          <a:xfrm>
+            <a:off x="567542" y="1817794"/>
+            <a:ext cx="6973273" cy="4753638"/>
+          </a:xfrm>
+          <a:prstGeom prst="rect">
+            <a:avLst/>
+          </a:prstGeom>
+        </p:spPr>
+      </p:pic>
+      <p:sp>
+        <p:nvSpPr>
+          <p:cNvPr id="7" name="正方形/長方形 6">
+            <a:extLst>
+              <a:ext uri="{FF2B5EF4-FFF2-40B4-BE49-F238E27FC236}">
+                <a16:creationId xmlns:a16="http://schemas.microsoft.com/office/drawing/2014/main" id="{BACC4412-AB7E-4AD0-A0E1-5A3A7E23ED4A}"/>
+              </a:ext>
+            </a:extLst>
+          </p:cNvPr>
+          <p:cNvSpPr/>
+          <p:nvPr/>
+        </p:nvSpPr>
+        <p:spPr>
+          <a:xfrm>
+            <a:off x="1744148" y="3648635"/>
+            <a:ext cx="5122817" cy="654424"/>
+          </a:xfrm>
+          <a:prstGeom prst="rect">
+            <a:avLst/>
+          </a:prstGeom>
+          <a:noFill/>
+          <a:ln w="76200">
+            <a:solidFill>
+              <a:srgbClr val="FF0000"/>
+            </a:solidFill>
+          </a:ln>
+        </p:spPr>
+        <p:style>
+          <a:lnRef idx="2">
+            <a:schemeClr val="accent1">
+              <a:shade val="50000"/>
+            </a:schemeClr>
+          </a:lnRef>
+          <a:fillRef idx="1">
+            <a:schemeClr val="accent1"/>
+          </a:fillRef>
+          <a:effectRef idx="0">
+            <a:schemeClr val="accent1"/>
+          </a:effectRef>
+          <a:fontRef idx="minor">
+            <a:schemeClr val="lt1"/>
+          </a:fontRef>
+        </p:style>
+        <p:txBody>
+          <a:bodyPr rtlCol="0" anchor="ctr"/>
+          <a:lstStyle/>
+          <a:p>
+            <a:pPr algn="ctr"/>
+            <a:endParaRPr kumimoji="1" lang="ja-JP" altLang="en-US"/>
+          </a:p>
+        </p:txBody>
+      </p:sp>
+      <p:sp>
+        <p:nvSpPr>
+          <p:cNvPr id="8" name="正方形/長方形 7">
+            <a:extLst>
+              <a:ext uri="{FF2B5EF4-FFF2-40B4-BE49-F238E27FC236}">
+                <a16:creationId xmlns:a16="http://schemas.microsoft.com/office/drawing/2014/main" id="{B5C5AC69-27D5-431C-B27F-07F8308570E1}"/>
+              </a:ext>
+            </a:extLst>
+          </p:cNvPr>
+          <p:cNvSpPr/>
+          <p:nvPr/>
+        </p:nvSpPr>
+        <p:spPr>
+          <a:xfrm>
+            <a:off x="4007224" y="5414682"/>
+            <a:ext cx="1873623" cy="340660"/>
+          </a:xfrm>
+          <a:prstGeom prst="rect">
+            <a:avLst/>
+          </a:prstGeom>
+          <a:noFill/>
+          <a:ln w="76200">
+            <a:solidFill>
+              <a:srgbClr val="FF0000"/>
+            </a:solidFill>
+          </a:ln>
+        </p:spPr>
+        <p:style>
+          <a:lnRef idx="2">
+            <a:schemeClr val="accent1">
+              <a:shade val="50000"/>
+            </a:schemeClr>
+          </a:lnRef>
+          <a:fillRef idx="1">
+            <a:schemeClr val="accent1"/>
+          </a:fillRef>
+          <a:effectRef idx="0">
+            <a:schemeClr val="accent1"/>
+          </a:effectRef>
+          <a:fontRef idx="minor">
+            <a:schemeClr val="lt1"/>
+          </a:fontRef>
+        </p:style>
+        <p:txBody>
+          <a:bodyPr rtlCol="0" anchor="ctr"/>
+          <a:lstStyle/>
+          <a:p>
+            <a:pPr algn="ctr"/>
+            <a:endParaRPr kumimoji="1" lang="ja-JP" altLang="en-US"/>
+          </a:p>
+        </p:txBody>
+      </p:sp>
+    </p:spTree>
+    <p:extLst>
+      <p:ext uri="{BB962C8B-B14F-4D97-AF65-F5344CB8AC3E}">
+        <p14:creationId xmlns:p14="http://schemas.microsoft.com/office/powerpoint/2010/main" val="1908405031"/>
+      </p:ext>
+    </p:extLst>
+  </p:cSld>
+  <p:clrMapOvr>
+    <a:masterClrMapping/>
+  </p:clrMapOvr>
+</p:sld>
+</file>
+
+<file path=ppt/slides/slide13.xml><?xml version="1.0" encoding="utf-8"?>
+<p:sld xmlns:a="http://schemas.openxmlformats.org/drawingml/2006/main" xmlns:r="http://schemas.openxmlformats.org/officeDocument/2006/relationships" xmlns:p="http://schemas.openxmlformats.org/presentationml/2006/main">
+  <p:cSld>
+    <p:spTree>
+      <p:nvGrpSpPr>
+        <p:cNvPr id="1" name=""/>
+        <p:cNvGrpSpPr/>
+        <p:nvPr/>
+      </p:nvGrpSpPr>
+      <p:grpSpPr>
+        <a:xfrm>
+          <a:off x="0" y="0"/>
+          <a:ext cx="0" cy="0"/>
+          <a:chOff x="0" y="0"/>
+          <a:chExt cx="0" cy="0"/>
+        </a:xfrm>
+      </p:grpSpPr>
+      <p:sp>
+        <p:nvSpPr>
+          <p:cNvPr id="4" name="テキスト ボックス 3">
+            <a:extLst>
+              <a:ext uri="{FF2B5EF4-FFF2-40B4-BE49-F238E27FC236}">
+                <a16:creationId xmlns:a16="http://schemas.microsoft.com/office/drawing/2014/main" id="{5A13BF46-B8C5-48AA-8308-C9ECFF431A18}"/>
+              </a:ext>
+            </a:extLst>
+          </p:cNvPr>
+          <p:cNvSpPr txBox="1"/>
+          <p:nvPr/>
+        </p:nvSpPr>
+        <p:spPr>
+          <a:xfrm>
+            <a:off x="567542" y="491954"/>
+            <a:ext cx="2646878" cy="584775"/>
+          </a:xfrm>
+          <a:prstGeom prst="rect">
+            <a:avLst/>
+          </a:prstGeom>
+          <a:noFill/>
+        </p:spPr>
+        <p:txBody>
+          <a:bodyPr wrap="none" rtlCol="0">
+            <a:spAutoFit/>
+          </a:bodyPr>
+          <a:lstStyle/>
+          <a:p>
+            <a:r>
+              <a:rPr lang="ja-JP" altLang="en-US" sz="3200" b="1" u="sng" dirty="0"/>
+              <a:t>クラスの継承</a:t>
+            </a:r>
+            <a:endParaRPr kumimoji="1" lang="ja-JP" altLang="en-US" sz="3200" b="1" u="sng" dirty="0"/>
+          </a:p>
+        </p:txBody>
+      </p:sp>
+      <p:sp>
+        <p:nvSpPr>
+          <p:cNvPr id="6" name="テキスト ボックス 5">
+            <a:extLst>
+              <a:ext uri="{FF2B5EF4-FFF2-40B4-BE49-F238E27FC236}">
+                <a16:creationId xmlns:a16="http://schemas.microsoft.com/office/drawing/2014/main" id="{55830AD6-028B-4C4E-80BF-B70DFC1C3A46}"/>
+              </a:ext>
+            </a:extLst>
+          </p:cNvPr>
+          <p:cNvSpPr txBox="1"/>
+          <p:nvPr/>
+        </p:nvSpPr>
+        <p:spPr>
+          <a:xfrm>
+            <a:off x="567542" y="1216429"/>
             <a:ext cx="9417963" cy="2677656"/>
           </a:xfrm>
           <a:prstGeom prst="rect">
@@ -4444,7 +4692,7 @@
 </p:sld>
 </file>
 
-<file path=ppt/slides/slide13.xml><?xml version="1.0" encoding="utf-8"?>
+<file path=ppt/slides/slide14.xml><?xml version="1.0" encoding="utf-8"?>
 <p:sld xmlns:a="http://schemas.openxmlformats.org/drawingml/2006/main" xmlns:r="http://schemas.openxmlformats.org/officeDocument/2006/relationships" xmlns:p="http://schemas.openxmlformats.org/presentationml/2006/main">
   <p:cSld>
     <p:spTree>
@@ -4805,7 +5053,7 @@
 </p:sld>
 </file>
 
-<file path=ppt/slides/slide14.xml><?xml version="1.0" encoding="utf-8"?>
+<file path=ppt/slides/slide15.xml><?xml version="1.0" encoding="utf-8"?>
 <p:sld xmlns:a="http://schemas.openxmlformats.org/drawingml/2006/main" xmlns:r="http://schemas.openxmlformats.org/officeDocument/2006/relationships" xmlns:p="http://schemas.openxmlformats.org/presentationml/2006/main">
   <p:cSld>
     <p:spTree>
@@ -6026,7 +6274,7 @@
         <p:spPr>
           <a:xfrm>
             <a:off x="567542" y="1216429"/>
-            <a:ext cx="3417923" cy="461665"/>
+            <a:ext cx="3377848" cy="461665"/>
           </a:xfrm>
           <a:prstGeom prst="rect">
             <a:avLst/>
@@ -6045,7 +6293,7 @@
                   <a:srgbClr val="FF0000"/>
                 </a:solidFill>
               </a:rPr>
-              <a:t>Main.cpp</a:t>
+              <a:t>Fruit.cpp</a:t>
             </a:r>
             <a:r>
               <a:rPr lang="ja-JP" altLang="en-US" sz="2400" dirty="0"/>
@@ -6057,10 +6305,10 @@
       </p:sp>
       <p:pic>
         <p:nvPicPr>
-          <p:cNvPr id="8" name="図 7">
-            <a:extLst>
-              <a:ext uri="{FF2B5EF4-FFF2-40B4-BE49-F238E27FC236}">
-                <a16:creationId xmlns:a16="http://schemas.microsoft.com/office/drawing/2014/main" id="{AC3ECECC-60F2-4762-B9E7-637BAEB6B250}"/>
+          <p:cNvPr id="5" name="図 4">
+            <a:extLst>
+              <a:ext uri="{FF2B5EF4-FFF2-40B4-BE49-F238E27FC236}">
+                <a16:creationId xmlns:a16="http://schemas.microsoft.com/office/drawing/2014/main" id="{1235E5CD-24A8-499E-B646-7FCAEB677533}"/>
               </a:ext>
             </a:extLst>
           </p:cNvPr>
@@ -6077,8 +6325,8 @@
         </p:blipFill>
         <p:spPr>
           <a:xfrm>
-            <a:off x="567542" y="1821987"/>
-            <a:ext cx="6973273" cy="4544059"/>
+            <a:off x="567542" y="1817794"/>
+            <a:ext cx="8863628" cy="2703406"/>
           </a:xfrm>
           <a:prstGeom prst="rect">
             <a:avLst/>
@@ -6088,7 +6336,7 @@
     </p:spTree>
     <p:extLst>
       <p:ext uri="{BB962C8B-B14F-4D97-AF65-F5344CB8AC3E}">
-        <p14:creationId xmlns:p14="http://schemas.microsoft.com/office/powerpoint/2010/main" val="1911996552"/>
+        <p14:creationId xmlns:p14="http://schemas.microsoft.com/office/powerpoint/2010/main" val="4144827373"/>
       </p:ext>
     </p:extLst>
   </p:cSld>
@@ -6166,7 +6414,7 @@
         <p:spPr>
           <a:xfrm>
             <a:off x="567542" y="1216429"/>
-            <a:ext cx="6032421" cy="461665"/>
+            <a:ext cx="3417923" cy="461665"/>
           </a:xfrm>
           <a:prstGeom prst="rect">
             <a:avLst/>
@@ -6180,8 +6428,16 @@
           <a:lstStyle/>
           <a:p>
             <a:r>
+              <a:rPr lang="en-US" altLang="ja-JP" sz="2400" b="1" dirty="0">
+                <a:solidFill>
+                  <a:srgbClr val="FF0000"/>
+                </a:solidFill>
+              </a:rPr>
+              <a:t>Main.cpp</a:t>
+            </a:r>
+            <a:r>
               <a:rPr lang="ja-JP" altLang="en-US" sz="2400" dirty="0"/>
-              <a:t>実行すると生産地と値段が表示されます。</a:t>
+              <a:t>を書きます。</a:t>
             </a:r>
             <a:endParaRPr lang="en-US" altLang="ja-JP" sz="2400" dirty="0"/>
           </a:p>
@@ -6189,10 +6445,10 @@
       </p:sp>
       <p:pic>
         <p:nvPicPr>
-          <p:cNvPr id="3" name="図 2">
-            <a:extLst>
-              <a:ext uri="{FF2B5EF4-FFF2-40B4-BE49-F238E27FC236}">
-                <a16:creationId xmlns:a16="http://schemas.microsoft.com/office/drawing/2014/main" id="{E0722827-97DA-4889-9157-55CB0C934A45}"/>
+          <p:cNvPr id="8" name="図 7">
+            <a:extLst>
+              <a:ext uri="{FF2B5EF4-FFF2-40B4-BE49-F238E27FC236}">
+                <a16:creationId xmlns:a16="http://schemas.microsoft.com/office/drawing/2014/main" id="{AC3ECECC-60F2-4762-B9E7-637BAEB6B250}"/>
               </a:ext>
             </a:extLst>
           </p:cNvPr>
@@ -6209,54 +6465,18 @@
         </p:blipFill>
         <p:spPr>
           <a:xfrm>
-            <a:off x="567542" y="1817793"/>
-            <a:ext cx="3457906" cy="1086771"/>
+            <a:off x="567542" y="1821987"/>
+            <a:ext cx="6973273" cy="4544059"/>
           </a:xfrm>
           <a:prstGeom prst="rect">
             <a:avLst/>
           </a:prstGeom>
         </p:spPr>
       </p:pic>
-      <p:sp>
-        <p:nvSpPr>
-          <p:cNvPr id="7" name="テキスト ボックス 6">
-            <a:extLst>
-              <a:ext uri="{FF2B5EF4-FFF2-40B4-BE49-F238E27FC236}">
-                <a16:creationId xmlns:a16="http://schemas.microsoft.com/office/drawing/2014/main" id="{0BFEEB0D-38DE-4602-8EB1-F3F9CBE53A3C}"/>
-              </a:ext>
-            </a:extLst>
-          </p:cNvPr>
-          <p:cNvSpPr txBox="1"/>
-          <p:nvPr/>
-        </p:nvSpPr>
-        <p:spPr>
-          <a:xfrm>
-            <a:off x="567542" y="3198167"/>
-            <a:ext cx="8186857" cy="461665"/>
-          </a:xfrm>
-          <a:prstGeom prst="rect">
-            <a:avLst/>
-          </a:prstGeom>
-          <a:noFill/>
-        </p:spPr>
-        <p:txBody>
-          <a:bodyPr wrap="none" rtlCol="0">
-            <a:spAutoFit/>
-          </a:bodyPr>
-          <a:lstStyle/>
-          <a:p>
-            <a:r>
-              <a:rPr lang="ja-JP" altLang="en-US" sz="2400" dirty="0"/>
-              <a:t>では、今回の各クラスについて詳しく見ていきましょう。</a:t>
-            </a:r>
-            <a:endParaRPr lang="en-US" altLang="ja-JP" sz="2400" dirty="0"/>
-          </a:p>
-        </p:txBody>
-      </p:sp>
     </p:spTree>
     <p:extLst>
       <p:ext uri="{BB962C8B-B14F-4D97-AF65-F5344CB8AC3E}">
-        <p14:creationId xmlns:p14="http://schemas.microsoft.com/office/powerpoint/2010/main" val="497684926"/>
+        <p14:creationId xmlns:p14="http://schemas.microsoft.com/office/powerpoint/2010/main" val="1911996552"/>
       </p:ext>
     </p:extLst>
   </p:cSld>
@@ -6334,7 +6554,7 @@
         <p:spPr>
           <a:xfrm>
             <a:off x="567542" y="1216429"/>
-            <a:ext cx="6782626" cy="3785652"/>
+            <a:ext cx="6032421" cy="461665"/>
           </a:xfrm>
           <a:prstGeom prst="rect">
             <a:avLst/>
@@ -6348,95 +6568,74 @@
           <a:lstStyle/>
           <a:p>
             <a:r>
-              <a:rPr lang="en-US" altLang="ja-JP" sz="2400" b="1" dirty="0">
-                <a:solidFill>
-                  <a:srgbClr val="00B050"/>
-                </a:solidFill>
-              </a:rPr>
-              <a:t>Food</a:t>
-            </a:r>
-            <a:r>
               <a:rPr lang="ja-JP" altLang="en-US" sz="2400" dirty="0"/>
-              <a:t>クラスのデータと機能は以下の通りです。</a:t>
+              <a:t>実行すると生産地と値段が表示されます。</a:t>
             </a:r>
             <a:endParaRPr lang="en-US" altLang="ja-JP" sz="2400" dirty="0"/>
           </a:p>
-          <a:p>
-            <a:endParaRPr lang="en-US" altLang="ja-JP" sz="2400" dirty="0"/>
-          </a:p>
-          <a:p>
-            <a:r>
-              <a:rPr lang="ja-JP" altLang="en-US" sz="2400" b="1" dirty="0">
-                <a:solidFill>
-                  <a:srgbClr val="FF0000"/>
-                </a:solidFill>
-              </a:rPr>
-              <a:t>■データ</a:t>
-            </a:r>
-            <a:endParaRPr lang="en-US" altLang="ja-JP" sz="2400" b="1" dirty="0">
-              <a:solidFill>
-                <a:srgbClr val="FF0000"/>
-              </a:solidFill>
-            </a:endParaRPr>
-          </a:p>
+        </p:txBody>
+      </p:sp>
+      <p:pic>
+        <p:nvPicPr>
+          <p:cNvPr id="3" name="図 2">
+            <a:extLst>
+              <a:ext uri="{FF2B5EF4-FFF2-40B4-BE49-F238E27FC236}">
+                <a16:creationId xmlns:a16="http://schemas.microsoft.com/office/drawing/2014/main" id="{E0722827-97DA-4889-9157-55CB0C934A45}"/>
+              </a:ext>
+            </a:extLst>
+          </p:cNvPr>
+          <p:cNvPicPr>
+            <a:picLocks noChangeAspect="1"/>
+          </p:cNvPicPr>
+          <p:nvPr/>
+        </p:nvPicPr>
+        <p:blipFill>
+          <a:blip r:embed="rId2"/>
+          <a:stretch>
+            <a:fillRect/>
+          </a:stretch>
+        </p:blipFill>
+        <p:spPr>
+          <a:xfrm>
+            <a:off x="567542" y="1817793"/>
+            <a:ext cx="3457906" cy="1086771"/>
+          </a:xfrm>
+          <a:prstGeom prst="rect">
+            <a:avLst/>
+          </a:prstGeom>
+        </p:spPr>
+      </p:pic>
+      <p:sp>
+        <p:nvSpPr>
+          <p:cNvPr id="7" name="テキスト ボックス 6">
+            <a:extLst>
+              <a:ext uri="{FF2B5EF4-FFF2-40B4-BE49-F238E27FC236}">
+                <a16:creationId xmlns:a16="http://schemas.microsoft.com/office/drawing/2014/main" id="{0BFEEB0D-38DE-4602-8EB1-F3F9CBE53A3C}"/>
+              </a:ext>
+            </a:extLst>
+          </p:cNvPr>
+          <p:cNvSpPr txBox="1"/>
+          <p:nvPr/>
+        </p:nvSpPr>
+        <p:spPr>
+          <a:xfrm>
+            <a:off x="567542" y="3198167"/>
+            <a:ext cx="8186857" cy="461665"/>
+          </a:xfrm>
+          <a:prstGeom prst="rect">
+            <a:avLst/>
+          </a:prstGeom>
+          <a:noFill/>
+        </p:spPr>
+        <p:txBody>
+          <a:bodyPr wrap="none" rtlCol="0">
+            <a:spAutoFit/>
+          </a:bodyPr>
+          <a:lstStyle/>
           <a:p>
             <a:r>
               <a:rPr lang="ja-JP" altLang="en-US" sz="2400" dirty="0"/>
-              <a:t>・値段</a:t>
-            </a:r>
-            <a:endParaRPr lang="en-US" altLang="ja-JP" sz="2400" dirty="0"/>
-          </a:p>
-          <a:p>
-            <a:endParaRPr lang="en-US" altLang="ja-JP" sz="2400" dirty="0"/>
-          </a:p>
-          <a:p>
-            <a:r>
-              <a:rPr lang="ja-JP" altLang="en-US" sz="2400" b="1" dirty="0">
-                <a:solidFill>
-                  <a:srgbClr val="FF0000"/>
-                </a:solidFill>
-              </a:rPr>
-              <a:t>■機能</a:t>
-            </a:r>
-            <a:endParaRPr lang="en-US" altLang="ja-JP" sz="2400" b="1" dirty="0">
-              <a:solidFill>
-                <a:srgbClr val="FF0000"/>
-              </a:solidFill>
-            </a:endParaRPr>
-          </a:p>
-          <a:p>
-            <a:r>
-              <a:rPr lang="ja-JP" altLang="en-US" sz="2400" dirty="0"/>
-              <a:t>・値段を設定する</a:t>
-            </a:r>
-            <a:endParaRPr lang="en-US" altLang="ja-JP" sz="2400" dirty="0"/>
-          </a:p>
-          <a:p>
-            <a:r>
-              <a:rPr lang="ja-JP" altLang="en-US" sz="2400" dirty="0"/>
-              <a:t>・値段を取得する</a:t>
-            </a:r>
-            <a:endParaRPr lang="en-US" altLang="ja-JP" sz="2400" dirty="0"/>
-          </a:p>
-          <a:p>
-            <a:endParaRPr lang="en-US" altLang="ja-JP" sz="2400" dirty="0"/>
-          </a:p>
-          <a:p>
-            <a:r>
-              <a:rPr lang="en-US" altLang="ja-JP" sz="2400" dirty="0"/>
-              <a:t>※</a:t>
-            </a:r>
-            <a:r>
-              <a:rPr lang="en-US" altLang="ja-JP" sz="2400" b="1" dirty="0" err="1">
-                <a:solidFill>
-                  <a:srgbClr val="FF0000"/>
-                </a:solidFill>
-              </a:rPr>
-              <a:t>Food.h</a:t>
-            </a:r>
-            <a:r>
-              <a:rPr lang="ja-JP" altLang="en-US" sz="2400" dirty="0"/>
-              <a:t>を見ながら確認しましょう</a:t>
+              <a:t>では、今回の各クラスについて詳しく見ていきましょう。</a:t>
             </a:r>
             <a:endParaRPr lang="en-US" altLang="ja-JP" sz="2400" dirty="0"/>
           </a:p>
@@ -6445,7 +6644,7 @@
     </p:spTree>
     <p:extLst>
       <p:ext uri="{BB962C8B-B14F-4D97-AF65-F5344CB8AC3E}">
-        <p14:creationId xmlns:p14="http://schemas.microsoft.com/office/powerpoint/2010/main" val="1805326399"/>
+        <p14:creationId xmlns:p14="http://schemas.microsoft.com/office/powerpoint/2010/main" val="497684926"/>
       </p:ext>
     </p:extLst>
   </p:cSld>
@@ -6523,7 +6722,7 @@
         <p:spPr>
           <a:xfrm>
             <a:off x="567542" y="1216429"/>
-            <a:ext cx="6744154" cy="3046988"/>
+            <a:ext cx="6782626" cy="3785652"/>
           </a:xfrm>
           <a:prstGeom prst="rect">
             <a:avLst/>
@@ -6542,7 +6741,7 @@
                   <a:srgbClr val="00B050"/>
                 </a:solidFill>
               </a:rPr>
-              <a:t>Fruit</a:t>
+              <a:t>Food</a:t>
             </a:r>
             <a:r>
               <a:rPr lang="ja-JP" altLang="en-US" sz="2400" dirty="0"/>
@@ -6571,7 +6770,7 @@
           <a:p>
             <a:r>
               <a:rPr lang="ja-JP" altLang="en-US" sz="2400" dirty="0"/>
-              <a:t>・農場名</a:t>
+              <a:t>・値段</a:t>
             </a:r>
             <a:endParaRPr lang="en-US" altLang="ja-JP" sz="2400" dirty="0"/>
           </a:p>
@@ -6596,14 +6795,36 @@
           <a:p>
             <a:r>
               <a:rPr lang="ja-JP" altLang="en-US" sz="2400" dirty="0"/>
-              <a:t>・農場名を設定する</a:t>
+              <a:t>・値段を設定する</a:t>
             </a:r>
             <a:endParaRPr lang="en-US" altLang="ja-JP" sz="2400" dirty="0"/>
           </a:p>
           <a:p>
             <a:r>
               <a:rPr lang="ja-JP" altLang="en-US" sz="2400" dirty="0"/>
-              <a:t>・農場名を取得する</a:t>
+              <a:t>・値段を取得する</a:t>
+            </a:r>
+            <a:endParaRPr lang="en-US" altLang="ja-JP" sz="2400" dirty="0"/>
+          </a:p>
+          <a:p>
+            <a:endParaRPr lang="en-US" altLang="ja-JP" sz="2400" dirty="0"/>
+          </a:p>
+          <a:p>
+            <a:r>
+              <a:rPr lang="en-US" altLang="ja-JP" sz="2400" dirty="0"/>
+              <a:t>※</a:t>
+            </a:r>
+            <a:r>
+              <a:rPr lang="en-US" altLang="ja-JP" sz="2400" b="1" dirty="0" err="1">
+                <a:solidFill>
+                  <a:srgbClr val="FF0000"/>
+                </a:solidFill>
+              </a:rPr>
+              <a:t>Food.h</a:t>
+            </a:r>
+            <a:r>
+              <a:rPr lang="ja-JP" altLang="en-US" sz="2400" dirty="0"/>
+              <a:t>を見ながら確認しましょう</a:t>
             </a:r>
             <a:endParaRPr lang="en-US" altLang="ja-JP" sz="2400" dirty="0"/>
           </a:p>
@@ -6612,7 +6833,7 @@
     </p:spTree>
     <p:extLst>
       <p:ext uri="{BB962C8B-B14F-4D97-AF65-F5344CB8AC3E}">
-        <p14:creationId xmlns:p14="http://schemas.microsoft.com/office/powerpoint/2010/main" val="255293246"/>
+        <p14:creationId xmlns:p14="http://schemas.microsoft.com/office/powerpoint/2010/main" val="1805326399"/>
       </p:ext>
     </p:extLst>
   </p:cSld>
@@ -6690,7 +6911,7 @@
         <p:spPr>
           <a:xfrm>
             <a:off x="567542" y="1216429"/>
-            <a:ext cx="10745249" cy="830997"/>
+            <a:ext cx="6744154" cy="3046988"/>
           </a:xfrm>
           <a:prstGeom prst="rect">
             <a:avLst/>
@@ -6704,162 +6925,82 @@
           <a:lstStyle/>
           <a:p>
             <a:r>
-              <a:rPr lang="ja-JP" altLang="en-US" sz="2400" dirty="0"/>
-              <a:t>ただし、</a:t>
-            </a:r>
-            <a:r>
               <a:rPr lang="en-US" altLang="ja-JP" sz="2400" b="1" dirty="0">
                 <a:solidFill>
-                  <a:srgbClr val="FF0000"/>
+                  <a:srgbClr val="00B050"/>
                 </a:solidFill>
               </a:rPr>
               <a:t>Fruit</a:t>
             </a:r>
+            <a:r>
+              <a:rPr lang="ja-JP" altLang="en-US" sz="2400" dirty="0"/>
+              <a:t>クラスのデータと機能は以下の通りです。</a:t>
+            </a:r>
+            <a:endParaRPr lang="en-US" altLang="ja-JP" sz="2400" dirty="0"/>
+          </a:p>
+          <a:p>
+            <a:endParaRPr lang="en-US" altLang="ja-JP" sz="2400" dirty="0"/>
+          </a:p>
+          <a:p>
             <a:r>
               <a:rPr lang="ja-JP" altLang="en-US" sz="2400" b="1" dirty="0">
                 <a:solidFill>
                   <a:srgbClr val="FF0000"/>
                 </a:solidFill>
               </a:rPr>
-              <a:t>クラスは宣言時に</a:t>
-            </a:r>
-            <a:r>
-              <a:rPr lang="en-US" altLang="ja-JP" sz="2400" b="1" dirty="0">
-                <a:solidFill>
-                  <a:srgbClr val="FF0000"/>
-                </a:solidFill>
-              </a:rPr>
-              <a:t>Food</a:t>
-            </a:r>
+              <a:t>■データ</a:t>
+            </a:r>
+            <a:endParaRPr lang="en-US" altLang="ja-JP" sz="2400" b="1" dirty="0">
+              <a:solidFill>
+                <a:srgbClr val="FF0000"/>
+              </a:solidFill>
+            </a:endParaRPr>
+          </a:p>
+          <a:p>
+            <a:r>
+              <a:rPr lang="ja-JP" altLang="en-US" sz="2400" dirty="0"/>
+              <a:t>・農場名</a:t>
+            </a:r>
+            <a:endParaRPr lang="en-US" altLang="ja-JP" sz="2400" dirty="0"/>
+          </a:p>
+          <a:p>
+            <a:endParaRPr lang="en-US" altLang="ja-JP" sz="2400" dirty="0"/>
+          </a:p>
+          <a:p>
             <a:r>
               <a:rPr lang="ja-JP" altLang="en-US" sz="2400" b="1" dirty="0">
                 <a:solidFill>
                   <a:srgbClr val="FF0000"/>
                 </a:solidFill>
               </a:rPr>
-              <a:t>クラスを継承</a:t>
-            </a:r>
+              <a:t>■機能</a:t>
+            </a:r>
+            <a:endParaRPr lang="en-US" altLang="ja-JP" sz="2400" b="1" dirty="0">
+              <a:solidFill>
+                <a:srgbClr val="FF0000"/>
+              </a:solidFill>
+            </a:endParaRPr>
+          </a:p>
+          <a:p>
             <a:r>
               <a:rPr lang="ja-JP" altLang="en-US" sz="2400" dirty="0"/>
-              <a:t>しています。</a:t>
+              <a:t>・農場名を設定する</a:t>
             </a:r>
             <a:endParaRPr lang="en-US" altLang="ja-JP" sz="2400" dirty="0"/>
           </a:p>
           <a:p>
             <a:r>
               <a:rPr lang="ja-JP" altLang="en-US" sz="2400" dirty="0"/>
-              <a:t>これは</a:t>
-            </a:r>
-            <a:r>
-              <a:rPr lang="en-US" altLang="ja-JP" sz="2400" b="1" dirty="0">
-                <a:solidFill>
-                  <a:srgbClr val="FF0000"/>
-                </a:solidFill>
-              </a:rPr>
-              <a:t>Food</a:t>
-            </a:r>
-            <a:r>
-              <a:rPr lang="ja-JP" altLang="en-US" sz="2400" b="1" dirty="0">
-                <a:solidFill>
-                  <a:srgbClr val="FF0000"/>
-                </a:solidFill>
-              </a:rPr>
-              <a:t>クラスのデータと機能をすべて引き継ぐ</a:t>
-            </a:r>
-            <a:r>
-              <a:rPr lang="ja-JP" altLang="en-US" sz="2400" dirty="0"/>
-              <a:t>という設定になります。</a:t>
+              <a:t>・農場名を取得する</a:t>
             </a:r>
             <a:endParaRPr lang="en-US" altLang="ja-JP" sz="2400" dirty="0"/>
-          </a:p>
-        </p:txBody>
-      </p:sp>
-      <p:pic>
-        <p:nvPicPr>
-          <p:cNvPr id="3" name="図 2">
-            <a:extLst>
-              <a:ext uri="{FF2B5EF4-FFF2-40B4-BE49-F238E27FC236}">
-                <a16:creationId xmlns:a16="http://schemas.microsoft.com/office/drawing/2014/main" id="{E21F31F4-8953-4CFE-B3CC-AE988AB8F30E}"/>
-              </a:ext>
-            </a:extLst>
-          </p:cNvPr>
-          <p:cNvPicPr>
-            <a:picLocks noChangeAspect="1"/>
-          </p:cNvPicPr>
-          <p:nvPr/>
-        </p:nvPicPr>
-        <p:blipFill>
-          <a:blip r:embed="rId2"/>
-          <a:stretch>
-            <a:fillRect/>
-          </a:stretch>
-        </p:blipFill>
-        <p:spPr>
-          <a:xfrm>
-            <a:off x="567541" y="2187126"/>
-            <a:ext cx="7637337" cy="4178920"/>
-          </a:xfrm>
-          <a:prstGeom prst="rect">
-            <a:avLst/>
-          </a:prstGeom>
-        </p:spPr>
-      </p:pic>
-      <p:sp>
-        <p:nvSpPr>
-          <p:cNvPr id="5" name="正方形/長方形 4">
-            <a:extLst>
-              <a:ext uri="{FF2B5EF4-FFF2-40B4-BE49-F238E27FC236}">
-                <a16:creationId xmlns:a16="http://schemas.microsoft.com/office/drawing/2014/main" id="{DA94D52C-A921-4AC2-BDB7-62E751D392E3}"/>
-              </a:ext>
-            </a:extLst>
-          </p:cNvPr>
-          <p:cNvSpPr/>
-          <p:nvPr/>
-        </p:nvSpPr>
-        <p:spPr>
-          <a:xfrm>
-            <a:off x="3304007" y="3558988"/>
-            <a:ext cx="2182333" cy="510988"/>
-          </a:xfrm>
-          <a:prstGeom prst="rect">
-            <a:avLst/>
-          </a:prstGeom>
-          <a:noFill/>
-          <a:ln w="76200">
-            <a:solidFill>
-              <a:srgbClr val="FF0000"/>
-            </a:solidFill>
-          </a:ln>
-        </p:spPr>
-        <p:style>
-          <a:lnRef idx="2">
-            <a:schemeClr val="accent1">
-              <a:shade val="50000"/>
-            </a:schemeClr>
-          </a:lnRef>
-          <a:fillRef idx="1">
-            <a:schemeClr val="accent1"/>
-          </a:fillRef>
-          <a:effectRef idx="0">
-            <a:schemeClr val="accent1"/>
-          </a:effectRef>
-          <a:fontRef idx="minor">
-            <a:schemeClr val="lt1"/>
-          </a:fontRef>
-        </p:style>
-        <p:txBody>
-          <a:bodyPr rtlCol="0" anchor="ctr"/>
-          <a:lstStyle/>
-          <a:p>
-            <a:pPr algn="ctr"/>
-            <a:endParaRPr kumimoji="1" lang="ja-JP" altLang="en-US"/>
           </a:p>
         </p:txBody>
       </p:sp>
     </p:spTree>
     <p:extLst>
       <p:ext uri="{BB962C8B-B14F-4D97-AF65-F5344CB8AC3E}">
-        <p14:creationId xmlns:p14="http://schemas.microsoft.com/office/powerpoint/2010/main" val="3098660177"/>
+        <p14:creationId xmlns:p14="http://schemas.microsoft.com/office/powerpoint/2010/main" val="255293246"/>
       </p:ext>
     </p:extLst>
   </p:cSld>
